--- a/Projet_2/Cahier_de_lab/PPW_schéma_2.pptx
+++ b/Projet_2/Cahier_de_lab/PPW_schéma_2.pptx
@@ -104,7 +104,137 @@
       </a:defRPr>
     </a:lvl9pPr>
   </p:defaultTextStyle>
+  <p:extLst>
+    <p:ext uri="{EFAFB233-063F-42B5-8137-9DF3F51BA10A}">
+      <p15:sldGuideLst xmlns:p15="http://schemas.microsoft.com/office/powerpoint/2012/main"/>
+    </p:ext>
+  </p:extLst>
 </p:presentation>
+</file>
+
+<file path=ppt/revisionInfo.xml><?xml version="1.0" encoding="utf-8"?>
+<p1510:revInfo xmlns:a="http://schemas.openxmlformats.org/drawingml/2006/main" xmlns:r="http://schemas.openxmlformats.org/officeDocument/2006/relationships" xmlns:p1510="http://schemas.microsoft.com/office/powerpoint/2015/10/main">
+  <p1510:revLst>
+    <p1510:client id="{BB04D268-5B8E-49B2-AA59-6798ABD425F6}" v="3" dt="2026-04-19T19:02:36.465"/>
+  </p1510:revLst>
+</p1510:revInfo>
+</file>
+
+<file path=ppt/changesInfos/changesInfo1.xml><?xml version="1.0" encoding="utf-8"?>
+<pc:chgInfo xmlns:a="http://schemas.openxmlformats.org/drawingml/2006/main" xmlns:r="http://schemas.openxmlformats.org/officeDocument/2006/relationships" xmlns:ac="http://schemas.microsoft.com/office/drawing/2013/main/command" xmlns:pc="http://schemas.microsoft.com/office/powerpoint/2013/main/command">
+  <pc:docChgLst>
+    <pc:chgData name="Mathilde Noël" userId="e8cc6f8fcd8ecae5" providerId="LiveId" clId="{25374B4B-595F-48B5-8902-A8E8E0647D3A}"/>
+    <pc:docChg chg="undo custSel modSld">
+      <pc:chgData name="Mathilde Noël" userId="e8cc6f8fcd8ecae5" providerId="LiveId" clId="{25374B4B-595F-48B5-8902-A8E8E0647D3A}" dt="2026-04-19T19:02:41.462" v="7" actId="1076"/>
+      <pc:docMkLst>
+        <pc:docMk/>
+      </pc:docMkLst>
+      <pc:sldChg chg="addSp modSp mod">
+        <pc:chgData name="Mathilde Noël" userId="e8cc6f8fcd8ecae5" providerId="LiveId" clId="{25374B4B-595F-48B5-8902-A8E8E0647D3A}" dt="2026-04-19T19:02:41.462" v="7" actId="1076"/>
+        <pc:sldMkLst>
+          <pc:docMk/>
+          <pc:sldMk cId="4071592598" sldId="256"/>
+        </pc:sldMkLst>
+        <pc:spChg chg="mod">
+          <ac:chgData name="Mathilde Noël" userId="e8cc6f8fcd8ecae5" providerId="LiveId" clId="{25374B4B-595F-48B5-8902-A8E8E0647D3A}" dt="2026-04-19T19:02:36.465" v="6" actId="164"/>
+          <ac:spMkLst>
+            <pc:docMk/>
+            <pc:sldMk cId="4071592598" sldId="256"/>
+            <ac:spMk id="8" creationId="{DBFE6E4E-4C35-ECC3-54D8-9FDCAF4EF168}"/>
+          </ac:spMkLst>
+        </pc:spChg>
+        <pc:spChg chg="mod">
+          <ac:chgData name="Mathilde Noël" userId="e8cc6f8fcd8ecae5" providerId="LiveId" clId="{25374B4B-595F-48B5-8902-A8E8E0647D3A}" dt="2026-04-19T19:02:36.465" v="6" actId="164"/>
+          <ac:spMkLst>
+            <pc:docMk/>
+            <pc:sldMk cId="4071592598" sldId="256"/>
+            <ac:spMk id="9" creationId="{8911F6FB-080F-59DE-8C76-D6BF93A967EC}"/>
+          </ac:spMkLst>
+        </pc:spChg>
+        <pc:spChg chg="mod">
+          <ac:chgData name="Mathilde Noël" userId="e8cc6f8fcd8ecae5" providerId="LiveId" clId="{25374B4B-595F-48B5-8902-A8E8E0647D3A}" dt="2026-04-19T19:02:36.465" v="6" actId="164"/>
+          <ac:spMkLst>
+            <pc:docMk/>
+            <pc:sldMk cId="4071592598" sldId="256"/>
+            <ac:spMk id="11" creationId="{190860D2-D73A-1AA8-417B-33211BF9C563}"/>
+          </ac:spMkLst>
+        </pc:spChg>
+        <pc:spChg chg="mod">
+          <ac:chgData name="Mathilde Noël" userId="e8cc6f8fcd8ecae5" providerId="LiveId" clId="{25374B4B-595F-48B5-8902-A8E8E0647D3A}" dt="2026-04-19T19:02:36.465" v="6" actId="164"/>
+          <ac:spMkLst>
+            <pc:docMk/>
+            <pc:sldMk cId="4071592598" sldId="256"/>
+            <ac:spMk id="12" creationId="{B7AF564A-D1C9-3083-565B-17A9787D295A}"/>
+          </ac:spMkLst>
+        </pc:spChg>
+        <pc:spChg chg="mod">
+          <ac:chgData name="Mathilde Noël" userId="e8cc6f8fcd8ecae5" providerId="LiveId" clId="{25374B4B-595F-48B5-8902-A8E8E0647D3A}" dt="2026-04-19T19:02:36.465" v="6" actId="164"/>
+          <ac:spMkLst>
+            <pc:docMk/>
+            <pc:sldMk cId="4071592598" sldId="256"/>
+            <ac:spMk id="13" creationId="{66299299-6744-7FD2-2283-657D5FF04E08}"/>
+          </ac:spMkLst>
+        </pc:spChg>
+        <pc:spChg chg="mod">
+          <ac:chgData name="Mathilde Noël" userId="e8cc6f8fcd8ecae5" providerId="LiveId" clId="{25374B4B-595F-48B5-8902-A8E8E0647D3A}" dt="2026-04-19T19:02:36.465" v="6" actId="164"/>
+          <ac:spMkLst>
+            <pc:docMk/>
+            <pc:sldMk cId="4071592598" sldId="256"/>
+            <ac:spMk id="27" creationId="{46EE208A-89B7-D13B-1D98-F24F754B1DFA}"/>
+          </ac:spMkLst>
+        </pc:spChg>
+        <pc:spChg chg="mod">
+          <ac:chgData name="Mathilde Noël" userId="e8cc6f8fcd8ecae5" providerId="LiveId" clId="{25374B4B-595F-48B5-8902-A8E8E0647D3A}" dt="2026-04-19T19:02:36.465" v="6" actId="164"/>
+          <ac:spMkLst>
+            <pc:docMk/>
+            <pc:sldMk cId="4071592598" sldId="256"/>
+            <ac:spMk id="28" creationId="{1294BCDF-9608-F5F9-B3BF-0FF530312D06}"/>
+          </ac:spMkLst>
+        </pc:spChg>
+        <pc:spChg chg="mod">
+          <ac:chgData name="Mathilde Noël" userId="e8cc6f8fcd8ecae5" providerId="LiveId" clId="{25374B4B-595F-48B5-8902-A8E8E0647D3A}" dt="2026-04-19T19:02:36.465" v="6" actId="164"/>
+          <ac:spMkLst>
+            <pc:docMk/>
+            <pc:sldMk cId="4071592598" sldId="256"/>
+            <ac:spMk id="29" creationId="{7EFE4209-B30C-76F7-E9D9-E7B0F19B4201}"/>
+          </ac:spMkLst>
+        </pc:spChg>
+        <pc:grpChg chg="add mod">
+          <ac:chgData name="Mathilde Noël" userId="e8cc6f8fcd8ecae5" providerId="LiveId" clId="{25374B4B-595F-48B5-8902-A8E8E0647D3A}" dt="2026-04-19T19:02:30.158" v="5" actId="164"/>
+          <ac:grpSpMkLst>
+            <pc:docMk/>
+            <pc:sldMk cId="4071592598" sldId="256"/>
+            <ac:grpSpMk id="2" creationId="{9DC69003-5C65-7A68-781E-CC83AAD7E666}"/>
+          </ac:grpSpMkLst>
+        </pc:grpChg>
+        <pc:grpChg chg="mod">
+          <ac:chgData name="Mathilde Noël" userId="e8cc6f8fcd8ecae5" providerId="LiveId" clId="{25374B4B-595F-48B5-8902-A8E8E0647D3A}" dt="2026-04-19T19:02:41.462" v="7" actId="1076"/>
+          <ac:grpSpMkLst>
+            <pc:docMk/>
+            <pc:sldMk cId="4071592598" sldId="256"/>
+            <ac:grpSpMk id="3" creationId="{77A86A32-F264-F4C7-9134-6359296EB0EF}"/>
+          </ac:grpSpMkLst>
+        </pc:grpChg>
+        <pc:picChg chg="mod">
+          <ac:chgData name="Mathilde Noël" userId="e8cc6f8fcd8ecae5" providerId="LiveId" clId="{25374B4B-595F-48B5-8902-A8E8E0647D3A}" dt="2026-04-19T19:02:36.465" v="6" actId="164"/>
+          <ac:picMkLst>
+            <pc:docMk/>
+            <pc:sldMk cId="4071592598" sldId="256"/>
+            <ac:picMk id="7" creationId="{2458E695-F803-7801-EA16-87FDABEAEFB7}"/>
+          </ac:picMkLst>
+        </pc:picChg>
+        <pc:picChg chg="mod">
+          <ac:chgData name="Mathilde Noël" userId="e8cc6f8fcd8ecae5" providerId="LiveId" clId="{25374B4B-595F-48B5-8902-A8E8E0647D3A}" dt="2026-04-19T19:02:36.465" v="6" actId="164"/>
+          <ac:picMkLst>
+            <pc:docMk/>
+            <pc:sldMk cId="4071592598" sldId="256"/>
+            <ac:picMk id="15" creationId="{F64C06FC-0510-E2A5-21D9-60112CBDE1A2}"/>
+          </ac:picMkLst>
+        </pc:picChg>
+      </pc:sldChg>
+    </pc:docChg>
+  </pc:docChgLst>
+</pc:chgInfo>
 </file>
 
 <file path=ppt/slideLayouts/slideLayout1.xml><?xml version="1.0" encoding="utf-8"?>
@@ -256,7 +386,7 @@
           <a:p>
             <a:fld id="{DAA7680F-9B95-42F5-B4F2-D43B2966A08B}" type="datetimeFigureOut">
               <a:rPr lang="fr-CA" smtClean="0"/>
-              <a:t>2026-04-15</a:t>
+              <a:t>2026-04-19</a:t>
             </a:fld>
             <a:endParaRPr lang="fr-CA"/>
           </a:p>
@@ -456,7 +586,7 @@
           <a:p>
             <a:fld id="{DAA7680F-9B95-42F5-B4F2-D43B2966A08B}" type="datetimeFigureOut">
               <a:rPr lang="fr-CA" smtClean="0"/>
-              <a:t>2026-04-15</a:t>
+              <a:t>2026-04-19</a:t>
             </a:fld>
             <a:endParaRPr lang="fr-CA"/>
           </a:p>
@@ -666,7 +796,7 @@
           <a:p>
             <a:fld id="{DAA7680F-9B95-42F5-B4F2-D43B2966A08B}" type="datetimeFigureOut">
               <a:rPr lang="fr-CA" smtClean="0"/>
-              <a:t>2026-04-15</a:t>
+              <a:t>2026-04-19</a:t>
             </a:fld>
             <a:endParaRPr lang="fr-CA"/>
           </a:p>
@@ -866,7 +996,7 @@
           <a:p>
             <a:fld id="{DAA7680F-9B95-42F5-B4F2-D43B2966A08B}" type="datetimeFigureOut">
               <a:rPr lang="fr-CA" smtClean="0"/>
-              <a:t>2026-04-15</a:t>
+              <a:t>2026-04-19</a:t>
             </a:fld>
             <a:endParaRPr lang="fr-CA"/>
           </a:p>
@@ -1142,7 +1272,7 @@
           <a:p>
             <a:fld id="{DAA7680F-9B95-42F5-B4F2-D43B2966A08B}" type="datetimeFigureOut">
               <a:rPr lang="fr-CA" smtClean="0"/>
-              <a:t>2026-04-15</a:t>
+              <a:t>2026-04-19</a:t>
             </a:fld>
             <a:endParaRPr lang="fr-CA"/>
           </a:p>
@@ -1410,7 +1540,7 @@
           <a:p>
             <a:fld id="{DAA7680F-9B95-42F5-B4F2-D43B2966A08B}" type="datetimeFigureOut">
               <a:rPr lang="fr-CA" smtClean="0"/>
-              <a:t>2026-04-15</a:t>
+              <a:t>2026-04-19</a:t>
             </a:fld>
             <a:endParaRPr lang="fr-CA"/>
           </a:p>
@@ -1825,7 +1955,7 @@
           <a:p>
             <a:fld id="{DAA7680F-9B95-42F5-B4F2-D43B2966A08B}" type="datetimeFigureOut">
               <a:rPr lang="fr-CA" smtClean="0"/>
-              <a:t>2026-04-15</a:t>
+              <a:t>2026-04-19</a:t>
             </a:fld>
             <a:endParaRPr lang="fr-CA"/>
           </a:p>
@@ -1967,7 +2097,7 @@
           <a:p>
             <a:fld id="{DAA7680F-9B95-42F5-B4F2-D43B2966A08B}" type="datetimeFigureOut">
               <a:rPr lang="fr-CA" smtClean="0"/>
-              <a:t>2026-04-15</a:t>
+              <a:t>2026-04-19</a:t>
             </a:fld>
             <a:endParaRPr lang="fr-CA"/>
           </a:p>
@@ -2080,7 +2210,7 @@
           <a:p>
             <a:fld id="{DAA7680F-9B95-42F5-B4F2-D43B2966A08B}" type="datetimeFigureOut">
               <a:rPr lang="fr-CA" smtClean="0"/>
-              <a:t>2026-04-15</a:t>
+              <a:t>2026-04-19</a:t>
             </a:fld>
             <a:endParaRPr lang="fr-CA"/>
           </a:p>
@@ -2393,7 +2523,7 @@
           <a:p>
             <a:fld id="{DAA7680F-9B95-42F5-B4F2-D43B2966A08B}" type="datetimeFigureOut">
               <a:rPr lang="fr-CA" smtClean="0"/>
-              <a:t>2026-04-15</a:t>
+              <a:t>2026-04-19</a:t>
             </a:fld>
             <a:endParaRPr lang="fr-CA"/>
           </a:p>
@@ -2682,7 +2812,7 @@
           <a:p>
             <a:fld id="{DAA7680F-9B95-42F5-B4F2-D43B2966A08B}" type="datetimeFigureOut">
               <a:rPr lang="fr-CA" smtClean="0"/>
-              <a:t>2026-04-15</a:t>
+              <a:t>2026-04-19</a:t>
             </a:fld>
             <a:endParaRPr lang="fr-CA"/>
           </a:p>
@@ -2925,7 +3055,7 @@
           <a:p>
             <a:fld id="{DAA7680F-9B95-42F5-B4F2-D43B2966A08B}" type="datetimeFigureOut">
               <a:rPr lang="fr-CA" smtClean="0"/>
-              <a:t>2026-04-15</a:t>
+              <a:t>2026-04-19</a:t>
             </a:fld>
             <a:endParaRPr lang="fr-CA"/>
           </a:p>
@@ -3342,597 +3472,615 @@
           <a:chExt cx="0" cy="0"/>
         </a:xfrm>
       </p:grpSpPr>
-      <p:pic>
-        <p:nvPicPr>
-          <p:cNvPr id="7" name="Image 6">
-            <a:extLst>
-              <a:ext uri="{FF2B5EF4-FFF2-40B4-BE49-F238E27FC236}">
-                <a16:creationId xmlns:a16="http://schemas.microsoft.com/office/drawing/2014/main" id="{2458E695-F803-7801-EA16-87FDABEAEFB7}"/>
-              </a:ext>
-            </a:extLst>
-          </p:cNvPr>
-          <p:cNvPicPr>
-            <a:picLocks noChangeAspect="1"/>
-          </p:cNvPicPr>
+      <p:grpSp>
+        <p:nvGrpSpPr>
+          <p:cNvPr id="3" name="Groupe 2">
+            <a:extLst>
+              <a:ext uri="{FF2B5EF4-FFF2-40B4-BE49-F238E27FC236}">
+                <a16:creationId xmlns:a16="http://schemas.microsoft.com/office/drawing/2014/main" id="{77A86A32-F264-F4C7-9134-6359296EB0EF}"/>
+              </a:ext>
+            </a:extLst>
+          </p:cNvPr>
+          <p:cNvGrpSpPr/>
           <p:nvPr/>
-        </p:nvPicPr>
-        <p:blipFill>
-          <a:blip r:embed="rId2"/>
-          <a:stretch>
-            <a:fillRect/>
-          </a:stretch>
-        </p:blipFill>
-        <p:spPr>
+        </p:nvGrpSpPr>
+        <p:grpSpPr>
           <a:xfrm>
-            <a:off x="5472392" y="2534982"/>
-            <a:ext cx="3261732" cy="2660678"/>
+            <a:off x="3210414" y="702960"/>
+            <a:ext cx="5771172" cy="5452079"/>
+            <a:chOff x="2962952" y="731659"/>
+            <a:chExt cx="5771172" cy="5452079"/>
           </a:xfrm>
-          <a:prstGeom prst="rect">
-            <a:avLst/>
-          </a:prstGeom>
-        </p:spPr>
-      </p:pic>
-      <p:sp>
-        <p:nvSpPr>
-          <p:cNvPr id="8" name="Rectangle : coins arrondis 7">
-            <a:extLst>
-              <a:ext uri="{FF2B5EF4-FFF2-40B4-BE49-F238E27FC236}">
-                <a16:creationId xmlns:a16="http://schemas.microsoft.com/office/drawing/2014/main" id="{DBFE6E4E-4C35-ECC3-54D8-9FDCAF4EF168}"/>
-              </a:ext>
-            </a:extLst>
-          </p:cNvPr>
-          <p:cNvSpPr/>
-          <p:nvPr/>
-        </p:nvSpPr>
-        <p:spPr>
-          <a:xfrm>
-            <a:off x="2962952" y="5329351"/>
-            <a:ext cx="1757144" cy="460249"/>
-          </a:xfrm>
-          <a:prstGeom prst="roundRect">
-            <a:avLst/>
-          </a:prstGeom>
-        </p:spPr>
-        <p:style>
-          <a:lnRef idx="2">
-            <a:schemeClr val="dk1"/>
-          </a:lnRef>
-          <a:fillRef idx="1">
-            <a:schemeClr val="lt1"/>
-          </a:fillRef>
-          <a:effectRef idx="0">
-            <a:schemeClr val="dk1"/>
-          </a:effectRef>
-          <a:fontRef idx="minor">
-            <a:schemeClr val="dk1"/>
-          </a:fontRef>
-        </p:style>
-        <p:txBody>
-          <a:bodyPr rtlCol="0" anchor="ctr"/>
-          <a:lstStyle/>
-          <a:p>
-            <a:pPr algn="ctr"/>
-            <a:r>
-              <a:rPr lang="fr-CA" sz="1400" dirty="0"/>
-              <a:t>Laser vert</a:t>
-            </a:r>
-          </a:p>
-        </p:txBody>
-      </p:sp>
-      <p:sp>
-        <p:nvSpPr>
-          <p:cNvPr id="9" name="Ellipse 8">
-            <a:extLst>
-              <a:ext uri="{FF2B5EF4-FFF2-40B4-BE49-F238E27FC236}">
-                <a16:creationId xmlns:a16="http://schemas.microsoft.com/office/drawing/2014/main" id="{8911F6FB-080F-59DE-8C76-D6BF93A967EC}"/>
-              </a:ext>
-            </a:extLst>
-          </p:cNvPr>
-          <p:cNvSpPr/>
-          <p:nvPr/>
-        </p:nvSpPr>
-        <p:spPr>
-          <a:xfrm>
-            <a:off x="5472392" y="5092651"/>
-            <a:ext cx="403015" cy="946798"/>
-          </a:xfrm>
-          <a:prstGeom prst="ellipse">
-            <a:avLst/>
-          </a:prstGeom>
-          <a:pattFill prst="ltUpDiag">
-            <a:fgClr>
+        </p:grpSpPr>
+        <p:pic>
+          <p:nvPicPr>
+            <p:cNvPr id="7" name="Image 6">
+              <a:extLst>
+                <a:ext uri="{FF2B5EF4-FFF2-40B4-BE49-F238E27FC236}">
+                  <a16:creationId xmlns:a16="http://schemas.microsoft.com/office/drawing/2014/main" id="{2458E695-F803-7801-EA16-87FDABEAEFB7}"/>
+                </a:ext>
+              </a:extLst>
+            </p:cNvPr>
+            <p:cNvPicPr>
+              <a:picLocks noChangeAspect="1"/>
+            </p:cNvPicPr>
+            <p:nvPr/>
+          </p:nvPicPr>
+          <p:blipFill>
+            <a:blip r:embed="rId2"/>
+            <a:stretch>
+              <a:fillRect/>
+            </a:stretch>
+          </p:blipFill>
+          <p:spPr>
+            <a:xfrm>
+              <a:off x="5472392" y="2534982"/>
+              <a:ext cx="3261732" cy="2660678"/>
+            </a:xfrm>
+            <a:prstGeom prst="rect">
+              <a:avLst/>
+            </a:prstGeom>
+          </p:spPr>
+        </p:pic>
+        <p:sp>
+          <p:nvSpPr>
+            <p:cNvPr id="8" name="Rectangle : coins arrondis 7">
+              <a:extLst>
+                <a:ext uri="{FF2B5EF4-FFF2-40B4-BE49-F238E27FC236}">
+                  <a16:creationId xmlns:a16="http://schemas.microsoft.com/office/drawing/2014/main" id="{DBFE6E4E-4C35-ECC3-54D8-9FDCAF4EF168}"/>
+                </a:ext>
+              </a:extLst>
+            </p:cNvPr>
+            <p:cNvSpPr/>
+            <p:nvPr/>
+          </p:nvSpPr>
+          <p:spPr>
+            <a:xfrm>
+              <a:off x="2962952" y="5329351"/>
+              <a:ext cx="1757144" cy="460249"/>
+            </a:xfrm>
+            <a:prstGeom prst="roundRect">
+              <a:avLst/>
+            </a:prstGeom>
+          </p:spPr>
+          <p:style>
+            <a:lnRef idx="2">
+              <a:schemeClr val="dk1"/>
+            </a:lnRef>
+            <a:fillRef idx="1">
+              <a:schemeClr val="lt1"/>
+            </a:fillRef>
+            <a:effectRef idx="0">
+              <a:schemeClr val="dk1"/>
+            </a:effectRef>
+            <a:fontRef idx="minor">
+              <a:schemeClr val="dk1"/>
+            </a:fontRef>
+          </p:style>
+          <p:txBody>
+            <a:bodyPr rtlCol="0" anchor="ctr"/>
+            <a:lstStyle/>
+            <a:p>
+              <a:pPr algn="ctr"/>
+              <a:r>
+                <a:rPr lang="fr-CA" sz="1400" dirty="0"/>
+                <a:t>Laser vert</a:t>
+              </a:r>
+            </a:p>
+          </p:txBody>
+        </p:sp>
+        <p:sp>
+          <p:nvSpPr>
+            <p:cNvPr id="9" name="Ellipse 8">
+              <a:extLst>
+                <a:ext uri="{FF2B5EF4-FFF2-40B4-BE49-F238E27FC236}">
+                  <a16:creationId xmlns:a16="http://schemas.microsoft.com/office/drawing/2014/main" id="{8911F6FB-080F-59DE-8C76-D6BF93A967EC}"/>
+                </a:ext>
+              </a:extLst>
+            </p:cNvPr>
+            <p:cNvSpPr/>
+            <p:nvPr/>
+          </p:nvSpPr>
+          <p:spPr>
+            <a:xfrm>
+              <a:off x="5472392" y="5092651"/>
+              <a:ext cx="403015" cy="946798"/>
+            </a:xfrm>
+            <a:prstGeom prst="ellipse">
+              <a:avLst/>
+            </a:prstGeom>
+            <a:pattFill prst="ltUpDiag">
+              <a:fgClr>
+                <a:schemeClr val="bg2">
+                  <a:lumMod val="75000"/>
+                </a:schemeClr>
+              </a:fgClr>
+              <a:bgClr>
+                <a:schemeClr val="bg1"/>
+              </a:bgClr>
+            </a:pattFill>
+          </p:spPr>
+          <p:style>
+            <a:lnRef idx="2">
+              <a:schemeClr val="dk1"/>
+            </a:lnRef>
+            <a:fillRef idx="1">
+              <a:schemeClr val="lt1"/>
+            </a:fillRef>
+            <a:effectRef idx="0">
+              <a:schemeClr val="dk1"/>
+            </a:effectRef>
+            <a:fontRef idx="minor">
+              <a:schemeClr val="dk1"/>
+            </a:fontRef>
+          </p:style>
+          <p:txBody>
+            <a:bodyPr rtlCol="0" anchor="ctr"/>
+            <a:lstStyle/>
+            <a:p>
+              <a:pPr algn="ctr"/>
+              <a:endParaRPr lang="fr-CA"/>
+            </a:p>
+          </p:txBody>
+        </p:sp>
+        <p:sp>
+          <p:nvSpPr>
+            <p:cNvPr id="11" name="Ellipse 10">
+              <a:extLst>
+                <a:ext uri="{FF2B5EF4-FFF2-40B4-BE49-F238E27FC236}">
+                  <a16:creationId xmlns:a16="http://schemas.microsoft.com/office/drawing/2014/main" id="{190860D2-D73A-1AA8-417B-33211BF9C563}"/>
+                </a:ext>
+              </a:extLst>
+            </p:cNvPr>
+            <p:cNvSpPr/>
+            <p:nvPr/>
+          </p:nvSpPr>
+          <p:spPr>
+            <a:xfrm rot="5400000">
+              <a:off x="6938883" y="1790266"/>
+              <a:ext cx="328749" cy="1160682"/>
+            </a:xfrm>
+            <a:prstGeom prst="ellipse">
+              <a:avLst/>
+            </a:prstGeom>
+            <a:pattFill prst="ltDnDiag">
+              <a:fgClr>
+                <a:schemeClr val="bg2">
+                  <a:lumMod val="75000"/>
+                </a:schemeClr>
+              </a:fgClr>
+              <a:bgClr>
+                <a:schemeClr val="bg1"/>
+              </a:bgClr>
+            </a:pattFill>
+          </p:spPr>
+          <p:style>
+            <a:lnRef idx="2">
+              <a:schemeClr val="dk1"/>
+            </a:lnRef>
+            <a:fillRef idx="1">
+              <a:schemeClr val="lt1"/>
+            </a:fillRef>
+            <a:effectRef idx="0">
+              <a:schemeClr val="dk1"/>
+            </a:effectRef>
+            <a:fontRef idx="minor">
+              <a:schemeClr val="dk1"/>
+            </a:fontRef>
+          </p:style>
+          <p:txBody>
+            <a:bodyPr rtlCol="0" anchor="ctr"/>
+            <a:lstStyle/>
+            <a:p>
+              <a:pPr algn="ctr"/>
+              <a:endParaRPr lang="fr-CA"/>
+            </a:p>
+          </p:txBody>
+        </p:sp>
+        <p:sp>
+          <p:nvSpPr>
+            <p:cNvPr id="12" name="Rectangle 11">
+              <a:extLst>
+                <a:ext uri="{FF2B5EF4-FFF2-40B4-BE49-F238E27FC236}">
+                  <a16:creationId xmlns:a16="http://schemas.microsoft.com/office/drawing/2014/main" id="{B7AF564A-D1C9-3083-565B-17A9787D295A}"/>
+                </a:ext>
+              </a:extLst>
+            </p:cNvPr>
+            <p:cNvSpPr/>
+            <p:nvPr/>
+          </p:nvSpPr>
+          <p:spPr>
+            <a:xfrm>
+              <a:off x="6522917" y="1422714"/>
+              <a:ext cx="1160682" cy="328749"/>
+            </a:xfrm>
+            <a:prstGeom prst="rect">
+              <a:avLst/>
+            </a:prstGeom>
+            <a:solidFill>
               <a:schemeClr val="bg2">
                 <a:lumMod val="75000"/>
               </a:schemeClr>
-            </a:fgClr>
-            <a:bgClr>
-              <a:schemeClr val="bg1"/>
-            </a:bgClr>
-          </a:pattFill>
-        </p:spPr>
-        <p:style>
-          <a:lnRef idx="2">
-            <a:schemeClr val="dk1"/>
-          </a:lnRef>
-          <a:fillRef idx="1">
-            <a:schemeClr val="lt1"/>
-          </a:fillRef>
-          <a:effectRef idx="0">
-            <a:schemeClr val="dk1"/>
-          </a:effectRef>
-          <a:fontRef idx="minor">
-            <a:schemeClr val="dk1"/>
-          </a:fontRef>
-        </p:style>
-        <p:txBody>
-          <a:bodyPr rtlCol="0" anchor="ctr"/>
-          <a:lstStyle/>
-          <a:p>
-            <a:pPr algn="ctr"/>
-            <a:endParaRPr lang="fr-CA"/>
-          </a:p>
-        </p:txBody>
-      </p:sp>
-      <p:sp>
-        <p:nvSpPr>
-          <p:cNvPr id="11" name="Ellipse 10">
-            <a:extLst>
-              <a:ext uri="{FF2B5EF4-FFF2-40B4-BE49-F238E27FC236}">
-                <a16:creationId xmlns:a16="http://schemas.microsoft.com/office/drawing/2014/main" id="{190860D2-D73A-1AA8-417B-33211BF9C563}"/>
-              </a:ext>
-            </a:extLst>
-          </p:cNvPr>
-          <p:cNvSpPr/>
-          <p:nvPr/>
-        </p:nvSpPr>
-        <p:spPr>
-          <a:xfrm rot="5400000">
-            <a:off x="6938883" y="1790266"/>
-            <a:ext cx="328749" cy="1160682"/>
-          </a:xfrm>
-          <a:prstGeom prst="ellipse">
-            <a:avLst/>
-          </a:prstGeom>
-          <a:pattFill prst="ltDnDiag">
-            <a:fgClr>
-              <a:schemeClr val="bg2">
-                <a:lumMod val="75000"/>
-              </a:schemeClr>
-            </a:fgClr>
-            <a:bgClr>
-              <a:schemeClr val="bg1"/>
-            </a:bgClr>
-          </a:pattFill>
-        </p:spPr>
-        <p:style>
-          <a:lnRef idx="2">
-            <a:schemeClr val="dk1"/>
-          </a:lnRef>
-          <a:fillRef idx="1">
-            <a:schemeClr val="lt1"/>
-          </a:fillRef>
-          <a:effectRef idx="0">
-            <a:schemeClr val="dk1"/>
-          </a:effectRef>
-          <a:fontRef idx="minor">
-            <a:schemeClr val="dk1"/>
-          </a:fontRef>
-        </p:style>
-        <p:txBody>
-          <a:bodyPr rtlCol="0" anchor="ctr"/>
-          <a:lstStyle/>
-          <a:p>
-            <a:pPr algn="ctr"/>
-            <a:endParaRPr lang="fr-CA"/>
-          </a:p>
-        </p:txBody>
-      </p:sp>
-      <p:sp>
-        <p:nvSpPr>
-          <p:cNvPr id="12" name="Rectangle 11">
-            <a:extLst>
-              <a:ext uri="{FF2B5EF4-FFF2-40B4-BE49-F238E27FC236}">
-                <a16:creationId xmlns:a16="http://schemas.microsoft.com/office/drawing/2014/main" id="{B7AF564A-D1C9-3083-565B-17A9787D295A}"/>
-              </a:ext>
-            </a:extLst>
-          </p:cNvPr>
-          <p:cNvSpPr/>
-          <p:nvPr/>
-        </p:nvSpPr>
-        <p:spPr>
-          <a:xfrm>
-            <a:off x="6522917" y="1422714"/>
-            <a:ext cx="1160682" cy="328749"/>
-          </a:xfrm>
-          <a:prstGeom prst="rect">
-            <a:avLst/>
-          </a:prstGeom>
-          <a:solidFill>
-            <a:schemeClr val="bg2">
-              <a:lumMod val="75000"/>
-            </a:schemeClr>
-          </a:solidFill>
-          <a:ln>
+            </a:solidFill>
+            <a:ln>
+              <a:solidFill>
+                <a:schemeClr val="tx1"/>
+              </a:solidFill>
+            </a:ln>
+          </p:spPr>
+          <p:style>
+            <a:lnRef idx="2">
+              <a:schemeClr val="dk1"/>
+            </a:lnRef>
+            <a:fillRef idx="1">
+              <a:schemeClr val="lt1"/>
+            </a:fillRef>
+            <a:effectRef idx="0">
+              <a:schemeClr val="dk1"/>
+            </a:effectRef>
+            <a:fontRef idx="minor">
+              <a:schemeClr val="dk1"/>
+            </a:fontRef>
+          </p:style>
+          <p:txBody>
+            <a:bodyPr rtlCol="0" anchor="ctr"/>
+            <a:lstStyle/>
+            <a:p>
+              <a:pPr algn="ctr"/>
+              <a:r>
+                <a:rPr lang="fr-CA" sz="1400" dirty="0"/>
+                <a:t>Filtre</a:t>
+              </a:r>
+              <a:endParaRPr lang="fr-CA" sz="1100" dirty="0"/>
+            </a:p>
+          </p:txBody>
+        </p:sp>
+        <p:sp>
+          <p:nvSpPr>
+            <p:cNvPr id="13" name="Rectangle 12">
+              <a:extLst>
+                <a:ext uri="{FF2B5EF4-FFF2-40B4-BE49-F238E27FC236}">
+                  <a16:creationId xmlns:a16="http://schemas.microsoft.com/office/drawing/2014/main" id="{66299299-6744-7FD2-2283-657D5FF04E08}"/>
+                </a:ext>
+              </a:extLst>
+            </p:cNvPr>
+            <p:cNvSpPr/>
+            <p:nvPr/>
+          </p:nvSpPr>
+          <p:spPr>
+            <a:xfrm>
+              <a:off x="6522915" y="731659"/>
+              <a:ext cx="1160682" cy="688182"/>
+            </a:xfrm>
+            <a:prstGeom prst="rect">
+              <a:avLst/>
+            </a:prstGeom>
+          </p:spPr>
+          <p:style>
+            <a:lnRef idx="2">
+              <a:schemeClr val="dk1"/>
+            </a:lnRef>
+            <a:fillRef idx="1">
+              <a:schemeClr val="lt1"/>
+            </a:fillRef>
+            <a:effectRef idx="0">
+              <a:schemeClr val="dk1"/>
+            </a:effectRef>
+            <a:fontRef idx="minor">
+              <a:schemeClr val="dk1"/>
+            </a:fontRef>
+          </p:style>
+          <p:txBody>
+            <a:bodyPr rtlCol="0" anchor="ctr"/>
+            <a:lstStyle/>
+            <a:p>
+              <a:pPr algn="ctr"/>
+              <a:r>
+                <a:rPr lang="fr-CA" sz="1400" dirty="0"/>
+                <a:t>Capteur</a:t>
+              </a:r>
+              <a:endParaRPr lang="fr-CA" sz="1050" dirty="0"/>
+            </a:p>
+          </p:txBody>
+        </p:sp>
+        <p:pic>
+          <p:nvPicPr>
+            <p:cNvPr id="15" name="Image 14">
+              <a:extLst>
+                <a:ext uri="{FF2B5EF4-FFF2-40B4-BE49-F238E27FC236}">
+                  <a16:creationId xmlns:a16="http://schemas.microsoft.com/office/drawing/2014/main" id="{F64C06FC-0510-E2A5-21D9-60112CBDE1A2}"/>
+                </a:ext>
+              </a:extLst>
+            </p:cNvPr>
+            <p:cNvPicPr>
+              <a:picLocks noChangeAspect="1"/>
+            </p:cNvPicPr>
+            <p:nvPr/>
+          </p:nvPicPr>
+          <p:blipFill>
+            <a:blip r:embed="rId3"/>
+            <a:srcRect l="62279" t="1008" r="23139" b="-1008"/>
+            <a:stretch>
+              <a:fillRect/>
+            </a:stretch>
+          </p:blipFill>
+          <p:spPr>
+            <a:xfrm rot="2508465" flipV="1">
+              <a:off x="6905902" y="5056460"/>
+              <a:ext cx="394709" cy="1127278"/>
+            </a:xfrm>
+            <a:prstGeom prst="rect">
+              <a:avLst/>
+            </a:prstGeom>
+          </p:spPr>
+        </p:pic>
+        <p:cxnSp>
+          <p:nvCxnSpPr>
+            <p:cNvPr id="17" name="Connecteur droit 16">
+              <a:extLst>
+                <a:ext uri="{FF2B5EF4-FFF2-40B4-BE49-F238E27FC236}">
+                  <a16:creationId xmlns:a16="http://schemas.microsoft.com/office/drawing/2014/main" id="{C7B947C1-1DCB-4FF5-935C-8BFC0EB00FF2}"/>
+                </a:ext>
+              </a:extLst>
+            </p:cNvPr>
+            <p:cNvCxnSpPr>
+              <a:cxnSpLocks/>
+              <a:stCxn id="8" idx="3"/>
+            </p:cNvCxnSpPr>
+            <p:nvPr/>
+          </p:nvCxnSpPr>
+          <p:spPr>
+            <a:xfrm>
+              <a:off x="4720096" y="5559475"/>
+              <a:ext cx="2383160" cy="0"/>
+            </a:xfrm>
+            <a:prstGeom prst="line">
+              <a:avLst/>
+            </a:prstGeom>
+            <a:ln>
+              <a:solidFill>
+                <a:schemeClr val="accent6">
+                  <a:lumMod val="75000"/>
+                </a:schemeClr>
+              </a:solidFill>
+              <a:prstDash val="solid"/>
+            </a:ln>
+          </p:spPr>
+          <p:style>
+            <a:lnRef idx="2">
+              <a:schemeClr val="accent3"/>
+            </a:lnRef>
+            <a:fillRef idx="0">
+              <a:schemeClr val="accent3"/>
+            </a:fillRef>
+            <a:effectRef idx="1">
+              <a:schemeClr val="accent3"/>
+            </a:effectRef>
+            <a:fontRef idx="minor">
+              <a:schemeClr val="tx1"/>
+            </a:fontRef>
+          </p:style>
+        </p:cxnSp>
+        <p:cxnSp>
+          <p:nvCxnSpPr>
+            <p:cNvPr id="22" name="Connecteur droit 21">
+              <a:extLst>
+                <a:ext uri="{FF2B5EF4-FFF2-40B4-BE49-F238E27FC236}">
+                  <a16:creationId xmlns:a16="http://schemas.microsoft.com/office/drawing/2014/main" id="{48FA456D-6B21-D16F-C783-E7BB072E5761}"/>
+                </a:ext>
+              </a:extLst>
+            </p:cNvPr>
+            <p:cNvCxnSpPr>
+              <a:cxnSpLocks/>
+              <a:stCxn id="12" idx="2"/>
+            </p:cNvCxnSpPr>
+            <p:nvPr/>
+          </p:nvCxnSpPr>
+          <p:spPr>
+            <a:xfrm flipH="1">
+              <a:off x="7103256" y="1751463"/>
+              <a:ext cx="2" cy="3808013"/>
+            </a:xfrm>
+            <a:prstGeom prst="line">
+              <a:avLst/>
+            </a:prstGeom>
+            <a:ln>
+              <a:solidFill>
+                <a:schemeClr val="accent6">
+                  <a:lumMod val="75000"/>
+                </a:schemeClr>
+              </a:solidFill>
+              <a:prstDash val="solid"/>
+            </a:ln>
+          </p:spPr>
+          <p:style>
+            <a:lnRef idx="2">
+              <a:schemeClr val="accent3"/>
+            </a:lnRef>
+            <a:fillRef idx="0">
+              <a:schemeClr val="accent3"/>
+            </a:fillRef>
+            <a:effectRef idx="1">
+              <a:schemeClr val="accent3"/>
+            </a:effectRef>
+            <a:fontRef idx="minor">
+              <a:schemeClr val="tx1"/>
+            </a:fontRef>
+          </p:style>
+        </p:cxnSp>
+        <p:sp>
+          <p:nvSpPr>
+            <p:cNvPr id="27" name="ZoneTexte 26">
+              <a:extLst>
+                <a:ext uri="{FF2B5EF4-FFF2-40B4-BE49-F238E27FC236}">
+                  <a16:creationId xmlns:a16="http://schemas.microsoft.com/office/drawing/2014/main" id="{46EE208A-89B7-D13B-1D98-F24F754B1DFA}"/>
+                </a:ext>
+              </a:extLst>
+            </p:cNvPr>
+            <p:cNvSpPr txBox="1"/>
+            <p:nvPr/>
+          </p:nvSpPr>
+          <p:spPr>
+            <a:xfrm>
+              <a:off x="5435426" y="4808660"/>
+              <a:ext cx="476250" cy="307777"/>
+            </a:xfrm>
+            <a:prstGeom prst="rect">
+              <a:avLst/>
+            </a:prstGeom>
+            <a:noFill/>
+          </p:spPr>
+          <p:txBody>
+            <a:bodyPr wrap="square">
+              <a:spAutoFit/>
+            </a:bodyPr>
+            <a:lstStyle/>
+            <a:p>
+              <a:pPr algn="ctr"/>
+              <a:r>
+                <a:rPr lang="fr-CA" sz="1400" dirty="0"/>
+                <a:t>P1</a:t>
+              </a:r>
+            </a:p>
+          </p:txBody>
+        </p:sp>
+        <p:sp>
+          <p:nvSpPr>
+            <p:cNvPr id="28" name="ZoneTexte 27">
+              <a:extLst>
+                <a:ext uri="{FF2B5EF4-FFF2-40B4-BE49-F238E27FC236}">
+                  <a16:creationId xmlns:a16="http://schemas.microsoft.com/office/drawing/2014/main" id="{1294BCDF-9608-F5F9-B3BF-0FF530312D06}"/>
+                </a:ext>
+              </a:extLst>
+            </p:cNvPr>
+            <p:cNvSpPr txBox="1"/>
+            <p:nvPr/>
+          </p:nvSpPr>
+          <p:spPr>
+            <a:xfrm>
+              <a:off x="6092651" y="2252142"/>
+              <a:ext cx="476250" cy="307777"/>
+            </a:xfrm>
+            <a:prstGeom prst="rect">
+              <a:avLst/>
+            </a:prstGeom>
+            <a:noFill/>
+          </p:spPr>
+          <p:txBody>
+            <a:bodyPr wrap="square">
+              <a:spAutoFit/>
+            </a:bodyPr>
+            <a:lstStyle/>
+            <a:p>
+              <a:pPr algn="ctr"/>
+              <a:r>
+                <a:rPr lang="fr-CA" sz="1400" dirty="0"/>
+                <a:t>P2</a:t>
+              </a:r>
+            </a:p>
+          </p:txBody>
+        </p:sp>
+        <p:sp>
+          <p:nvSpPr>
+            <p:cNvPr id="29" name="Rectangle : coins arrondis 28">
+              <a:extLst>
+                <a:ext uri="{FF2B5EF4-FFF2-40B4-BE49-F238E27FC236}">
+                  <a16:creationId xmlns:a16="http://schemas.microsoft.com/office/drawing/2014/main" id="{7EFE4209-B30C-76F7-E9D9-E7B0F19B4201}"/>
+                </a:ext>
+              </a:extLst>
+            </p:cNvPr>
+            <p:cNvSpPr/>
+            <p:nvPr/>
+          </p:nvSpPr>
+          <p:spPr>
+            <a:xfrm>
+              <a:off x="4084377" y="1473397"/>
+              <a:ext cx="1468965" cy="556132"/>
+            </a:xfrm>
+            <a:prstGeom prst="roundRect">
+              <a:avLst/>
+            </a:prstGeom>
             <a:solidFill>
+              <a:srgbClr val="F5C2A5"/>
+            </a:solidFill>
+            <a:ln>
+              <a:solidFill>
+                <a:schemeClr val="tx1"/>
+              </a:solidFill>
+            </a:ln>
+          </p:spPr>
+          <p:style>
+            <a:lnRef idx="2">
+              <a:schemeClr val="dk1"/>
+            </a:lnRef>
+            <a:fillRef idx="1">
+              <a:schemeClr val="lt1"/>
+            </a:fillRef>
+            <a:effectRef idx="0">
+              <a:schemeClr val="dk1"/>
+            </a:effectRef>
+            <a:fontRef idx="minor">
+              <a:schemeClr val="dk1"/>
+            </a:fontRef>
+          </p:style>
+          <p:txBody>
+            <a:bodyPr rtlCol="0" anchor="ctr"/>
+            <a:lstStyle/>
+            <a:p>
+              <a:pPr algn="ctr"/>
+              <a:r>
+                <a:rPr lang="fr-CA" sz="1400" dirty="0"/>
+                <a:t>Multimètre</a:t>
+              </a:r>
+            </a:p>
+          </p:txBody>
+        </p:sp>
+        <p:cxnSp>
+          <p:nvCxnSpPr>
+            <p:cNvPr id="31" name="Connecteur : en arc 30">
+              <a:extLst>
+                <a:ext uri="{FF2B5EF4-FFF2-40B4-BE49-F238E27FC236}">
+                  <a16:creationId xmlns:a16="http://schemas.microsoft.com/office/drawing/2014/main" id="{DC0053D5-C76B-7EB0-C1C1-CB7CEF1344B1}"/>
+                </a:ext>
+              </a:extLst>
+            </p:cNvPr>
+            <p:cNvCxnSpPr>
+              <a:cxnSpLocks/>
+              <a:stCxn id="29" idx="3"/>
+              <a:endCxn id="13" idx="1"/>
+            </p:cNvCxnSpPr>
+            <p:nvPr/>
+          </p:nvCxnSpPr>
+          <p:spPr>
+            <a:xfrm flipV="1">
+              <a:off x="5553342" y="1075750"/>
+              <a:ext cx="969573" cy="675713"/>
+            </a:xfrm>
+            <a:prstGeom prst="curvedConnector3">
+              <a:avLst/>
+            </a:prstGeom>
+            <a:ln>
+              <a:solidFill>
+                <a:schemeClr val="tx1"/>
+              </a:solidFill>
+            </a:ln>
+          </p:spPr>
+          <p:style>
+            <a:lnRef idx="2">
+              <a:schemeClr val="accent1"/>
+            </a:lnRef>
+            <a:fillRef idx="0">
+              <a:schemeClr val="accent1"/>
+            </a:fillRef>
+            <a:effectRef idx="1">
+              <a:schemeClr val="accent1"/>
+            </a:effectRef>
+            <a:fontRef idx="minor">
               <a:schemeClr val="tx1"/>
-            </a:solidFill>
-          </a:ln>
-        </p:spPr>
-        <p:style>
-          <a:lnRef idx="2">
-            <a:schemeClr val="dk1"/>
-          </a:lnRef>
-          <a:fillRef idx="1">
-            <a:schemeClr val="lt1"/>
-          </a:fillRef>
-          <a:effectRef idx="0">
-            <a:schemeClr val="dk1"/>
-          </a:effectRef>
-          <a:fontRef idx="minor">
-            <a:schemeClr val="dk1"/>
-          </a:fontRef>
-        </p:style>
-        <p:txBody>
-          <a:bodyPr rtlCol="0" anchor="ctr"/>
-          <a:lstStyle/>
-          <a:p>
-            <a:pPr algn="ctr"/>
-            <a:r>
-              <a:rPr lang="fr-CA" sz="1400" dirty="0"/>
-              <a:t>Filtre</a:t>
-            </a:r>
-            <a:endParaRPr lang="fr-CA" sz="1100" dirty="0"/>
-          </a:p>
-        </p:txBody>
-      </p:sp>
-      <p:sp>
-        <p:nvSpPr>
-          <p:cNvPr id="13" name="Rectangle 12">
-            <a:extLst>
-              <a:ext uri="{FF2B5EF4-FFF2-40B4-BE49-F238E27FC236}">
-                <a16:creationId xmlns:a16="http://schemas.microsoft.com/office/drawing/2014/main" id="{66299299-6744-7FD2-2283-657D5FF04E08}"/>
-              </a:ext>
-            </a:extLst>
-          </p:cNvPr>
-          <p:cNvSpPr/>
-          <p:nvPr/>
-        </p:nvSpPr>
-        <p:spPr>
-          <a:xfrm>
-            <a:off x="6522915" y="731659"/>
-            <a:ext cx="1160682" cy="688182"/>
-          </a:xfrm>
-          <a:prstGeom prst="rect">
-            <a:avLst/>
-          </a:prstGeom>
-        </p:spPr>
-        <p:style>
-          <a:lnRef idx="2">
-            <a:schemeClr val="dk1"/>
-          </a:lnRef>
-          <a:fillRef idx="1">
-            <a:schemeClr val="lt1"/>
-          </a:fillRef>
-          <a:effectRef idx="0">
-            <a:schemeClr val="dk1"/>
-          </a:effectRef>
-          <a:fontRef idx="minor">
-            <a:schemeClr val="dk1"/>
-          </a:fontRef>
-        </p:style>
-        <p:txBody>
-          <a:bodyPr rtlCol="0" anchor="ctr"/>
-          <a:lstStyle/>
-          <a:p>
-            <a:pPr algn="ctr"/>
-            <a:r>
-              <a:rPr lang="fr-CA" sz="1400" dirty="0"/>
-              <a:t>Capteur</a:t>
-            </a:r>
-            <a:endParaRPr lang="fr-CA" sz="1050" dirty="0"/>
-          </a:p>
-        </p:txBody>
-      </p:sp>
-      <p:pic>
-        <p:nvPicPr>
-          <p:cNvPr id="15" name="Image 14">
-            <a:extLst>
-              <a:ext uri="{FF2B5EF4-FFF2-40B4-BE49-F238E27FC236}">
-                <a16:creationId xmlns:a16="http://schemas.microsoft.com/office/drawing/2014/main" id="{F64C06FC-0510-E2A5-21D9-60112CBDE1A2}"/>
-              </a:ext>
-            </a:extLst>
-          </p:cNvPr>
-          <p:cNvPicPr>
-            <a:picLocks noChangeAspect="1"/>
-          </p:cNvPicPr>
-          <p:nvPr/>
-        </p:nvPicPr>
-        <p:blipFill>
-          <a:blip r:embed="rId3"/>
-          <a:srcRect l="62279" t="1008" r="23139" b="-1008"/>
-          <a:stretch>
-            <a:fillRect/>
-          </a:stretch>
-        </p:blipFill>
-        <p:spPr>
-          <a:xfrm rot="2508465" flipV="1">
-            <a:off x="6905902" y="5056460"/>
-            <a:ext cx="394709" cy="1127278"/>
-          </a:xfrm>
-          <a:prstGeom prst="rect">
-            <a:avLst/>
-          </a:prstGeom>
-        </p:spPr>
-      </p:pic>
-      <p:cxnSp>
-        <p:nvCxnSpPr>
-          <p:cNvPr id="17" name="Connecteur droit 16">
-            <a:extLst>
-              <a:ext uri="{FF2B5EF4-FFF2-40B4-BE49-F238E27FC236}">
-                <a16:creationId xmlns:a16="http://schemas.microsoft.com/office/drawing/2014/main" id="{C7B947C1-1DCB-4FF5-935C-8BFC0EB00FF2}"/>
-              </a:ext>
-            </a:extLst>
-          </p:cNvPr>
-          <p:cNvCxnSpPr>
-            <a:cxnSpLocks/>
-            <a:stCxn id="8" idx="3"/>
-          </p:cNvCxnSpPr>
-          <p:nvPr/>
-        </p:nvCxnSpPr>
-        <p:spPr>
-          <a:xfrm>
-            <a:off x="4720096" y="5559475"/>
-            <a:ext cx="2383160" cy="0"/>
-          </a:xfrm>
-          <a:prstGeom prst="line">
-            <a:avLst/>
-          </a:prstGeom>
-          <a:ln>
-            <a:solidFill>
-              <a:schemeClr val="accent6">
-                <a:lumMod val="75000"/>
-              </a:schemeClr>
-            </a:solidFill>
-            <a:prstDash val="solid"/>
-          </a:ln>
-        </p:spPr>
-        <p:style>
-          <a:lnRef idx="2">
-            <a:schemeClr val="accent3"/>
-          </a:lnRef>
-          <a:fillRef idx="0">
-            <a:schemeClr val="accent3"/>
-          </a:fillRef>
-          <a:effectRef idx="1">
-            <a:schemeClr val="accent3"/>
-          </a:effectRef>
-          <a:fontRef idx="minor">
-            <a:schemeClr val="tx1"/>
-          </a:fontRef>
-        </p:style>
-      </p:cxnSp>
-      <p:cxnSp>
-        <p:nvCxnSpPr>
-          <p:cNvPr id="22" name="Connecteur droit 21">
-            <a:extLst>
-              <a:ext uri="{FF2B5EF4-FFF2-40B4-BE49-F238E27FC236}">
-                <a16:creationId xmlns:a16="http://schemas.microsoft.com/office/drawing/2014/main" id="{48FA456D-6B21-D16F-C783-E7BB072E5761}"/>
-              </a:ext>
-            </a:extLst>
-          </p:cNvPr>
-          <p:cNvCxnSpPr>
-            <a:cxnSpLocks/>
-            <a:stCxn id="12" idx="2"/>
-          </p:cNvCxnSpPr>
-          <p:nvPr/>
-        </p:nvCxnSpPr>
-        <p:spPr>
-          <a:xfrm flipH="1">
-            <a:off x="7103256" y="1751463"/>
-            <a:ext cx="2" cy="3808013"/>
-          </a:xfrm>
-          <a:prstGeom prst="line">
-            <a:avLst/>
-          </a:prstGeom>
-          <a:ln>
-            <a:solidFill>
-              <a:schemeClr val="accent6">
-                <a:lumMod val="75000"/>
-              </a:schemeClr>
-            </a:solidFill>
-            <a:prstDash val="solid"/>
-          </a:ln>
-        </p:spPr>
-        <p:style>
-          <a:lnRef idx="2">
-            <a:schemeClr val="accent3"/>
-          </a:lnRef>
-          <a:fillRef idx="0">
-            <a:schemeClr val="accent3"/>
-          </a:fillRef>
-          <a:effectRef idx="1">
-            <a:schemeClr val="accent3"/>
-          </a:effectRef>
-          <a:fontRef idx="minor">
-            <a:schemeClr val="tx1"/>
-          </a:fontRef>
-        </p:style>
-      </p:cxnSp>
-      <p:sp>
-        <p:nvSpPr>
-          <p:cNvPr id="27" name="ZoneTexte 26">
-            <a:extLst>
-              <a:ext uri="{FF2B5EF4-FFF2-40B4-BE49-F238E27FC236}">
-                <a16:creationId xmlns:a16="http://schemas.microsoft.com/office/drawing/2014/main" id="{46EE208A-89B7-D13B-1D98-F24F754B1DFA}"/>
-              </a:ext>
-            </a:extLst>
-          </p:cNvPr>
-          <p:cNvSpPr txBox="1"/>
-          <p:nvPr/>
-        </p:nvSpPr>
-        <p:spPr>
-          <a:xfrm>
-            <a:off x="5435426" y="4808660"/>
-            <a:ext cx="476250" cy="307777"/>
-          </a:xfrm>
-          <a:prstGeom prst="rect">
-            <a:avLst/>
-          </a:prstGeom>
-          <a:noFill/>
-        </p:spPr>
-        <p:txBody>
-          <a:bodyPr wrap="square">
-            <a:spAutoFit/>
-          </a:bodyPr>
-          <a:lstStyle/>
-          <a:p>
-            <a:pPr algn="ctr"/>
-            <a:r>
-              <a:rPr lang="fr-CA" sz="1400" dirty="0"/>
-              <a:t>P1</a:t>
-            </a:r>
-          </a:p>
-        </p:txBody>
-      </p:sp>
-      <p:sp>
-        <p:nvSpPr>
-          <p:cNvPr id="28" name="ZoneTexte 27">
-            <a:extLst>
-              <a:ext uri="{FF2B5EF4-FFF2-40B4-BE49-F238E27FC236}">
-                <a16:creationId xmlns:a16="http://schemas.microsoft.com/office/drawing/2014/main" id="{1294BCDF-9608-F5F9-B3BF-0FF530312D06}"/>
-              </a:ext>
-            </a:extLst>
-          </p:cNvPr>
-          <p:cNvSpPr txBox="1"/>
-          <p:nvPr/>
-        </p:nvSpPr>
-        <p:spPr>
-          <a:xfrm>
-            <a:off x="6092651" y="2252142"/>
-            <a:ext cx="476250" cy="307777"/>
-          </a:xfrm>
-          <a:prstGeom prst="rect">
-            <a:avLst/>
-          </a:prstGeom>
-          <a:noFill/>
-        </p:spPr>
-        <p:txBody>
-          <a:bodyPr wrap="square">
-            <a:spAutoFit/>
-          </a:bodyPr>
-          <a:lstStyle/>
-          <a:p>
-            <a:pPr algn="ctr"/>
-            <a:r>
-              <a:rPr lang="fr-CA" sz="1400" dirty="0"/>
-              <a:t>P2</a:t>
-            </a:r>
-          </a:p>
-        </p:txBody>
-      </p:sp>
-      <p:sp>
-        <p:nvSpPr>
-          <p:cNvPr id="29" name="Rectangle : coins arrondis 28">
-            <a:extLst>
-              <a:ext uri="{FF2B5EF4-FFF2-40B4-BE49-F238E27FC236}">
-                <a16:creationId xmlns:a16="http://schemas.microsoft.com/office/drawing/2014/main" id="{7EFE4209-B30C-76F7-E9D9-E7B0F19B4201}"/>
-              </a:ext>
-            </a:extLst>
-          </p:cNvPr>
-          <p:cNvSpPr/>
-          <p:nvPr/>
-        </p:nvSpPr>
-        <p:spPr>
-          <a:xfrm>
-            <a:off x="4084377" y="1473397"/>
-            <a:ext cx="1468965" cy="556132"/>
-          </a:xfrm>
-          <a:prstGeom prst="roundRect">
-            <a:avLst/>
-          </a:prstGeom>
-          <a:solidFill>
-            <a:schemeClr val="tx2">
-              <a:lumMod val="25000"/>
-              <a:lumOff val="75000"/>
-            </a:schemeClr>
-          </a:solidFill>
-          <a:ln>
-            <a:solidFill>
-              <a:schemeClr val="tx1"/>
-            </a:solidFill>
-          </a:ln>
-        </p:spPr>
-        <p:style>
-          <a:lnRef idx="2">
-            <a:schemeClr val="dk1"/>
-          </a:lnRef>
-          <a:fillRef idx="1">
-            <a:schemeClr val="lt1"/>
-          </a:fillRef>
-          <a:effectRef idx="0">
-            <a:schemeClr val="dk1"/>
-          </a:effectRef>
-          <a:fontRef idx="minor">
-            <a:schemeClr val="dk1"/>
-          </a:fontRef>
-        </p:style>
-        <p:txBody>
-          <a:bodyPr rtlCol="0" anchor="ctr"/>
-          <a:lstStyle/>
-          <a:p>
-            <a:pPr algn="ctr"/>
-            <a:r>
-              <a:rPr lang="fr-CA" sz="1400" dirty="0"/>
-              <a:t>Multimètre</a:t>
-            </a:r>
-          </a:p>
-        </p:txBody>
-      </p:sp>
-      <p:cxnSp>
-        <p:nvCxnSpPr>
-          <p:cNvPr id="31" name="Connecteur : en arc 30">
-            <a:extLst>
-              <a:ext uri="{FF2B5EF4-FFF2-40B4-BE49-F238E27FC236}">
-                <a16:creationId xmlns:a16="http://schemas.microsoft.com/office/drawing/2014/main" id="{DC0053D5-C76B-7EB0-C1C1-CB7CEF1344B1}"/>
-              </a:ext>
-            </a:extLst>
-          </p:cNvPr>
-          <p:cNvCxnSpPr>
-            <a:cxnSpLocks/>
-            <a:stCxn id="29" idx="3"/>
-            <a:endCxn id="13" idx="1"/>
-          </p:cNvCxnSpPr>
-          <p:nvPr/>
-        </p:nvCxnSpPr>
-        <p:spPr>
-          <a:xfrm flipV="1">
-            <a:off x="5553342" y="1075750"/>
-            <a:ext cx="969573" cy="675713"/>
-          </a:xfrm>
-          <a:prstGeom prst="curvedConnector3">
-            <a:avLst/>
-          </a:prstGeom>
-          <a:ln>
-            <a:solidFill>
-              <a:schemeClr val="tx1"/>
-            </a:solidFill>
-          </a:ln>
-        </p:spPr>
-        <p:style>
-          <a:lnRef idx="2">
-            <a:schemeClr val="accent1"/>
-          </a:lnRef>
-          <a:fillRef idx="0">
-            <a:schemeClr val="accent1"/>
-          </a:fillRef>
-          <a:effectRef idx="1">
-            <a:schemeClr val="accent1"/>
-          </a:effectRef>
-          <a:fontRef idx="minor">
-            <a:schemeClr val="tx1"/>
-          </a:fontRef>
-        </p:style>
-      </p:cxnSp>
+            </a:fontRef>
+          </p:style>
+        </p:cxnSp>
+      </p:grpSp>
     </p:spTree>
     <p:extLst>
       <p:ext uri="{BB962C8B-B14F-4D97-AF65-F5344CB8AC3E}">

--- a/Projet_2/Cahier_de_lab/PPW_schéma_2.pptx
+++ b/Projet_2/Cahier_de_lab/PPW_schéma_2.pptx
@@ -125,18 +125,18 @@
   <pc:docChgLst>
     <pc:chgData name="Mathilde Noël" userId="e8cc6f8fcd8ecae5" providerId="LiveId" clId="{25374B4B-595F-48B5-8902-A8E8E0647D3A}"/>
     <pc:docChg chg="undo custSel modSld">
-      <pc:chgData name="Mathilde Noël" userId="e8cc6f8fcd8ecae5" providerId="LiveId" clId="{25374B4B-595F-48B5-8902-A8E8E0647D3A}" dt="2026-04-19T19:02:41.462" v="7" actId="1076"/>
+      <pc:chgData name="Mathilde Noël" userId="e8cc6f8fcd8ecae5" providerId="LiveId" clId="{25374B4B-595F-48B5-8902-A8E8E0647D3A}" dt="2026-04-22T02:43:43.623" v="21" actId="207"/>
       <pc:docMkLst>
         <pc:docMk/>
       </pc:docMkLst>
       <pc:sldChg chg="addSp modSp mod">
-        <pc:chgData name="Mathilde Noël" userId="e8cc6f8fcd8ecae5" providerId="LiveId" clId="{25374B4B-595F-48B5-8902-A8E8E0647D3A}" dt="2026-04-19T19:02:41.462" v="7" actId="1076"/>
+        <pc:chgData name="Mathilde Noël" userId="e8cc6f8fcd8ecae5" providerId="LiveId" clId="{25374B4B-595F-48B5-8902-A8E8E0647D3A}" dt="2026-04-22T02:43:43.623" v="21" actId="207"/>
         <pc:sldMkLst>
           <pc:docMk/>
           <pc:sldMk cId="4071592598" sldId="256"/>
         </pc:sldMkLst>
         <pc:spChg chg="mod">
-          <ac:chgData name="Mathilde Noël" userId="e8cc6f8fcd8ecae5" providerId="LiveId" clId="{25374B4B-595F-48B5-8902-A8E8E0647D3A}" dt="2026-04-19T19:02:36.465" v="6" actId="164"/>
+          <ac:chgData name="Mathilde Noël" userId="e8cc6f8fcd8ecae5" providerId="LiveId" clId="{25374B4B-595F-48B5-8902-A8E8E0647D3A}" dt="2026-04-22T02:43:43.623" v="21" actId="207"/>
           <ac:spMkLst>
             <pc:docMk/>
             <pc:sldMk cId="4071592598" sldId="256"/>
@@ -199,14 +199,6 @@
             <ac:spMk id="29" creationId="{7EFE4209-B30C-76F7-E9D9-E7B0F19B4201}"/>
           </ac:spMkLst>
         </pc:spChg>
-        <pc:grpChg chg="add mod">
-          <ac:chgData name="Mathilde Noël" userId="e8cc6f8fcd8ecae5" providerId="LiveId" clId="{25374B4B-595F-48B5-8902-A8E8E0647D3A}" dt="2026-04-19T19:02:30.158" v="5" actId="164"/>
-          <ac:grpSpMkLst>
-            <pc:docMk/>
-            <pc:sldMk cId="4071592598" sldId="256"/>
-            <ac:grpSpMk id="2" creationId="{9DC69003-5C65-7A68-781E-CC83AAD7E666}"/>
-          </ac:grpSpMkLst>
-        </pc:grpChg>
         <pc:grpChg chg="mod">
           <ac:chgData name="Mathilde Noël" userId="e8cc6f8fcd8ecae5" providerId="LiveId" clId="{25374B4B-595F-48B5-8902-A8E8E0647D3A}" dt="2026-04-19T19:02:41.462" v="7" actId="1076"/>
           <ac:grpSpMkLst>
@@ -231,6 +223,14 @@
             <ac:picMk id="15" creationId="{F64C06FC-0510-E2A5-21D9-60112CBDE1A2}"/>
           </ac:picMkLst>
         </pc:picChg>
+        <pc:cxnChg chg="mod">
+          <ac:chgData name="Mathilde Noël" userId="e8cc6f8fcd8ecae5" providerId="LiveId" clId="{25374B4B-595F-48B5-8902-A8E8E0647D3A}" dt="2026-04-22T02:42:55.371" v="20" actId="14100"/>
+          <ac:cxnSpMkLst>
+            <pc:docMk/>
+            <pc:sldMk cId="4071592598" sldId="256"/>
+            <ac:cxnSpMk id="17" creationId="{C7B947C1-1DCB-4FF5-935C-8BFC0EB00FF2}"/>
+          </ac:cxnSpMkLst>
+        </pc:cxnChg>
       </pc:sldChg>
     </pc:docChg>
   </pc:docChgLst>
@@ -386,7 +386,7 @@
           <a:p>
             <a:fld id="{DAA7680F-9B95-42F5-B4F2-D43B2966A08B}" type="datetimeFigureOut">
               <a:rPr lang="fr-CA" smtClean="0"/>
-              <a:t>2026-04-19</a:t>
+              <a:t>2026-04-21</a:t>
             </a:fld>
             <a:endParaRPr lang="fr-CA"/>
           </a:p>
@@ -586,7 +586,7 @@
           <a:p>
             <a:fld id="{DAA7680F-9B95-42F5-B4F2-D43B2966A08B}" type="datetimeFigureOut">
               <a:rPr lang="fr-CA" smtClean="0"/>
-              <a:t>2026-04-19</a:t>
+              <a:t>2026-04-21</a:t>
             </a:fld>
             <a:endParaRPr lang="fr-CA"/>
           </a:p>
@@ -796,7 +796,7 @@
           <a:p>
             <a:fld id="{DAA7680F-9B95-42F5-B4F2-D43B2966A08B}" type="datetimeFigureOut">
               <a:rPr lang="fr-CA" smtClean="0"/>
-              <a:t>2026-04-19</a:t>
+              <a:t>2026-04-21</a:t>
             </a:fld>
             <a:endParaRPr lang="fr-CA"/>
           </a:p>
@@ -996,7 +996,7 @@
           <a:p>
             <a:fld id="{DAA7680F-9B95-42F5-B4F2-D43B2966A08B}" type="datetimeFigureOut">
               <a:rPr lang="fr-CA" smtClean="0"/>
-              <a:t>2026-04-19</a:t>
+              <a:t>2026-04-21</a:t>
             </a:fld>
             <a:endParaRPr lang="fr-CA"/>
           </a:p>
@@ -1272,7 +1272,7 @@
           <a:p>
             <a:fld id="{DAA7680F-9B95-42F5-B4F2-D43B2966A08B}" type="datetimeFigureOut">
               <a:rPr lang="fr-CA" smtClean="0"/>
-              <a:t>2026-04-19</a:t>
+              <a:t>2026-04-21</a:t>
             </a:fld>
             <a:endParaRPr lang="fr-CA"/>
           </a:p>
@@ -1540,7 +1540,7 @@
           <a:p>
             <a:fld id="{DAA7680F-9B95-42F5-B4F2-D43B2966A08B}" type="datetimeFigureOut">
               <a:rPr lang="fr-CA" smtClean="0"/>
-              <a:t>2026-04-19</a:t>
+              <a:t>2026-04-21</a:t>
             </a:fld>
             <a:endParaRPr lang="fr-CA"/>
           </a:p>
@@ -1955,7 +1955,7 @@
           <a:p>
             <a:fld id="{DAA7680F-9B95-42F5-B4F2-D43B2966A08B}" type="datetimeFigureOut">
               <a:rPr lang="fr-CA" smtClean="0"/>
-              <a:t>2026-04-19</a:t>
+              <a:t>2026-04-21</a:t>
             </a:fld>
             <a:endParaRPr lang="fr-CA"/>
           </a:p>
@@ -2097,7 +2097,7 @@
           <a:p>
             <a:fld id="{DAA7680F-9B95-42F5-B4F2-D43B2966A08B}" type="datetimeFigureOut">
               <a:rPr lang="fr-CA" smtClean="0"/>
-              <a:t>2026-04-19</a:t>
+              <a:t>2026-04-21</a:t>
             </a:fld>
             <a:endParaRPr lang="fr-CA"/>
           </a:p>
@@ -2210,7 +2210,7 @@
           <a:p>
             <a:fld id="{DAA7680F-9B95-42F5-B4F2-D43B2966A08B}" type="datetimeFigureOut">
               <a:rPr lang="fr-CA" smtClean="0"/>
-              <a:t>2026-04-19</a:t>
+              <a:t>2026-04-21</a:t>
             </a:fld>
             <a:endParaRPr lang="fr-CA"/>
           </a:p>
@@ -2523,7 +2523,7 @@
           <a:p>
             <a:fld id="{DAA7680F-9B95-42F5-B4F2-D43B2966A08B}" type="datetimeFigureOut">
               <a:rPr lang="fr-CA" smtClean="0"/>
-              <a:t>2026-04-19</a:t>
+              <a:t>2026-04-21</a:t>
             </a:fld>
             <a:endParaRPr lang="fr-CA"/>
           </a:p>
@@ -2812,7 +2812,7 @@
           <a:p>
             <a:fld id="{DAA7680F-9B95-42F5-B4F2-D43B2966A08B}" type="datetimeFigureOut">
               <a:rPr lang="fr-CA" smtClean="0"/>
-              <a:t>2026-04-19</a:t>
+              <a:t>2026-04-21</a:t>
             </a:fld>
             <a:endParaRPr lang="fr-CA"/>
           </a:p>
@@ -3055,7 +3055,7 @@
           <a:p>
             <a:fld id="{DAA7680F-9B95-42F5-B4F2-D43B2966A08B}" type="datetimeFigureOut">
               <a:rPr lang="fr-CA" smtClean="0"/>
-              <a:t>2026-04-19</a:t>
+              <a:t>2026-04-21</a:t>
             </a:fld>
             <a:endParaRPr lang="fr-CA"/>
           </a:p>
@@ -3486,10 +3486,10 @@
         </p:nvGrpSpPr>
         <p:grpSpPr>
           <a:xfrm>
-            <a:off x="3210414" y="702960"/>
-            <a:ext cx="5771172" cy="5452079"/>
-            <a:chOff x="2962952" y="731659"/>
-            <a:chExt cx="5771172" cy="5452079"/>
+            <a:off x="3189055" y="702960"/>
+            <a:ext cx="5792531" cy="5452079"/>
+            <a:chOff x="2941593" y="731659"/>
+            <a:chExt cx="5792531" cy="5452079"/>
           </a:xfrm>
         </p:grpSpPr>
         <p:pic>
@@ -3536,12 +3536,18 @@
           </p:nvSpPr>
           <p:spPr>
             <a:xfrm>
-              <a:off x="2962952" y="5329351"/>
-              <a:ext cx="1757144" cy="460249"/>
+              <a:off x="2941593" y="5334193"/>
+              <a:ext cx="1757144" cy="487500"/>
             </a:xfrm>
             <a:prstGeom prst="roundRect">
               <a:avLst/>
             </a:prstGeom>
+            <a:solidFill>
+              <a:schemeClr val="accent6">
+                <a:lumMod val="20000"/>
+                <a:lumOff val="80000"/>
+              </a:schemeClr>
+            </a:solidFill>
           </p:spPr>
           <p:style>
             <a:lnRef idx="2">
@@ -3565,6 +3571,13 @@
               <a:r>
                 <a:rPr lang="fr-CA" sz="1400" dirty="0"/>
                 <a:t>Laser vert</a:t>
+              </a:r>
+            </a:p>
+            <a:p>
+              <a:pPr algn="ctr"/>
+              <a:r>
+                <a:rPr lang="fr-CA" sz="1400" dirty="0"/>
+                <a:t> (532 nm)</a:t>
               </a:r>
             </a:p>
           </p:txBody>
@@ -3830,9 +3843,9 @@
             <p:nvPr/>
           </p:nvCxnSpPr>
           <p:spPr>
-            <a:xfrm>
-              <a:off x="4720096" y="5559475"/>
-              <a:ext cx="2383160" cy="0"/>
+            <a:xfrm flipV="1">
+              <a:off x="4698737" y="5559476"/>
+              <a:ext cx="2404519" cy="18467"/>
             </a:xfrm>
             <a:prstGeom prst="line">
               <a:avLst/>
